--- a/ETL_Architecture/ETL_flowchart.pptx
+++ b/ETL_Architecture/ETL_flowchart.pptx
@@ -327,7 +327,7 @@
             <a:fld id="{1D8BD707-D9CF-40AE-B4C6-C98DA3205C09}" type="datetimeFigureOut">
               <a:rPr lang="en-US" smtClean="0"/>
               <a:pPr/>
-              <a:t>6/5/2026</a:t>
+              <a:t>6/12/2026</a:t>
             </a:fld>
             <a:endParaRPr lang="en-US"/>
           </a:p>
@@ -492,7 +492,7 @@
             <a:fld id="{1D8BD707-D9CF-40AE-B4C6-C98DA3205C09}" type="datetimeFigureOut">
               <a:rPr lang="en-US" smtClean="0"/>
               <a:pPr/>
-              <a:t>6/5/2026</a:t>
+              <a:t>6/12/2026</a:t>
             </a:fld>
             <a:endParaRPr lang="en-US"/>
           </a:p>
@@ -667,7 +667,7 @@
             <a:fld id="{1D8BD707-D9CF-40AE-B4C6-C98DA3205C09}" type="datetimeFigureOut">
               <a:rPr lang="en-US" smtClean="0"/>
               <a:pPr/>
-              <a:t>6/5/2026</a:t>
+              <a:t>6/12/2026</a:t>
             </a:fld>
             <a:endParaRPr lang="en-US"/>
           </a:p>
@@ -832,7 +832,7 @@
             <a:fld id="{1D8BD707-D9CF-40AE-B4C6-C98DA3205C09}" type="datetimeFigureOut">
               <a:rPr lang="en-US" smtClean="0"/>
               <a:pPr/>
-              <a:t>6/5/2026</a:t>
+              <a:t>6/12/2026</a:t>
             </a:fld>
             <a:endParaRPr lang="en-US"/>
           </a:p>
@@ -1074,7 +1074,7 @@
             <a:fld id="{1D8BD707-D9CF-40AE-B4C6-C98DA3205C09}" type="datetimeFigureOut">
               <a:rPr lang="en-US" smtClean="0"/>
               <a:pPr/>
-              <a:t>6/5/2026</a:t>
+              <a:t>6/12/2026</a:t>
             </a:fld>
             <a:endParaRPr lang="en-US"/>
           </a:p>
@@ -1356,7 +1356,7 @@
             <a:fld id="{1D8BD707-D9CF-40AE-B4C6-C98DA3205C09}" type="datetimeFigureOut">
               <a:rPr lang="en-US" smtClean="0"/>
               <a:pPr/>
-              <a:t>6/5/2026</a:t>
+              <a:t>6/12/2026</a:t>
             </a:fld>
             <a:endParaRPr lang="en-US"/>
           </a:p>
@@ -1772,7 +1772,7 @@
             <a:fld id="{1D8BD707-D9CF-40AE-B4C6-C98DA3205C09}" type="datetimeFigureOut">
               <a:rPr lang="en-US" smtClean="0"/>
               <a:pPr/>
-              <a:t>6/5/2026</a:t>
+              <a:t>6/12/2026</a:t>
             </a:fld>
             <a:endParaRPr lang="en-US"/>
           </a:p>
@@ -1886,7 +1886,7 @@
             <a:fld id="{1D8BD707-D9CF-40AE-B4C6-C98DA3205C09}" type="datetimeFigureOut">
               <a:rPr lang="en-US" smtClean="0"/>
               <a:pPr/>
-              <a:t>6/5/2026</a:t>
+              <a:t>6/12/2026</a:t>
             </a:fld>
             <a:endParaRPr lang="en-US"/>
           </a:p>
@@ -1978,7 +1978,7 @@
             <a:fld id="{1D8BD707-D9CF-40AE-B4C6-C98DA3205C09}" type="datetimeFigureOut">
               <a:rPr lang="en-US" smtClean="0"/>
               <a:pPr/>
-              <a:t>6/5/2026</a:t>
+              <a:t>6/12/2026</a:t>
             </a:fld>
             <a:endParaRPr lang="en-US"/>
           </a:p>
@@ -2250,7 +2250,7 @@
             <a:fld id="{1D8BD707-D9CF-40AE-B4C6-C98DA3205C09}" type="datetimeFigureOut">
               <a:rPr lang="en-US" smtClean="0"/>
               <a:pPr/>
-              <a:t>6/5/2026</a:t>
+              <a:t>6/12/2026</a:t>
             </a:fld>
             <a:endParaRPr lang="en-US"/>
           </a:p>
@@ -2499,7 +2499,7 @@
             <a:fld id="{1D8BD707-D9CF-40AE-B4C6-C98DA3205C09}" type="datetimeFigureOut">
               <a:rPr lang="en-US" smtClean="0"/>
               <a:pPr/>
-              <a:t>6/5/2026</a:t>
+              <a:t>6/12/2026</a:t>
             </a:fld>
             <a:endParaRPr lang="en-US"/>
           </a:p>
@@ -2707,7 +2707,7 @@
             <a:fld id="{1D8BD707-D9CF-40AE-B4C6-C98DA3205C09}" type="datetimeFigureOut">
               <a:rPr lang="en-US" smtClean="0"/>
               <a:pPr/>
-              <a:t>6/5/2026</a:t>
+              <a:t>6/12/2026</a:t>
             </a:fld>
             <a:endParaRPr lang="en-US"/>
           </a:p>
@@ -4033,7 +4033,7 @@
         </p:nvSpPr>
         <p:spPr>
           <a:xfrm>
-            <a:off x="2438400" y="2869071"/>
+            <a:off x="2590800" y="2830009"/>
             <a:ext cx="14935200" cy="6001643"/>
           </a:xfrm>
           <a:prstGeom prst="rect">
@@ -9073,7 +9073,7 @@
           <a:bodyPr/>
           <a:lstStyle/>
           <a:p>
-            <a:endParaRPr lang="fr-BE"/>
+            <a:endParaRPr lang="en-US" noProof="0" dirty="0"/>
           </a:p>
         </p:txBody>
       </p:sp>
@@ -9104,7 +9104,7 @@
           <a:bodyPr/>
           <a:lstStyle/>
           <a:p>
-            <a:endParaRPr lang="fr-BE"/>
+            <a:endParaRPr lang="en-US" noProof="0" dirty="0"/>
           </a:p>
         </p:txBody>
       </p:sp>
@@ -9176,7 +9176,7 @@
             <a:bodyPr/>
             <a:lstStyle/>
             <a:p>
-              <a:endParaRPr lang="fr-BE"/>
+              <a:endParaRPr lang="en-US" noProof="0" dirty="0"/>
             </a:p>
           </p:txBody>
         </p:sp>
@@ -9204,7 +9204,7 @@
                   <a:spcPts val="2240"/>
                 </a:lnSpc>
               </a:pPr>
-              <a:endParaRPr/>
+              <a:endParaRPr lang="en-US" noProof="0" dirty="0"/>
             </a:p>
           </p:txBody>
         </p:sp>
@@ -9277,7 +9277,7 @@
             <a:bodyPr/>
             <a:lstStyle/>
             <a:p>
-              <a:endParaRPr lang="fr-BE"/>
+              <a:endParaRPr lang="en-US" noProof="0" dirty="0"/>
             </a:p>
           </p:txBody>
         </p:sp>
@@ -9305,7 +9305,7 @@
                   <a:spcPts val="2240"/>
                 </a:lnSpc>
               </a:pPr>
-              <a:endParaRPr/>
+              <a:endParaRPr lang="en-US" noProof="0" dirty="0"/>
             </a:p>
           </p:txBody>
         </p:sp>
@@ -9378,7 +9378,7 @@
             <a:bodyPr/>
             <a:lstStyle/>
             <a:p>
-              <a:endParaRPr lang="fr-BE"/>
+              <a:endParaRPr lang="en-US" noProof="0" dirty="0"/>
             </a:p>
           </p:txBody>
         </p:sp>
@@ -9406,7 +9406,7 @@
                   <a:spcPts val="2240"/>
                 </a:lnSpc>
               </a:pPr>
-              <a:endParaRPr/>
+              <a:endParaRPr lang="en-US" noProof="0" dirty="0"/>
             </a:p>
           </p:txBody>
         </p:sp>
@@ -9438,12 +9438,12 @@
               </a:lnSpc>
             </a:pPr>
             <a:r>
-              <a:rPr lang="fr-BE" sz="4800" dirty="0">
+              <a:rPr lang="en-US" sz="4800" noProof="0" dirty="0">
                 <a:latin typeface="TT Hoves Bold" panose="020B0604020202020204" charset="0"/>
               </a:rPr>
               <a:t>ETL Pipeline</a:t>
             </a:r>
-            <a:endParaRPr lang="en-US" sz="4800" b="1" dirty="0">
+            <a:endParaRPr lang="en-US" sz="4800" b="1" noProof="0" dirty="0">
               <a:solidFill>
                 <a:srgbClr val="000000"/>
               </a:solidFill>
@@ -9482,82 +9482,10 @@
               </a:lnSpc>
             </a:pPr>
             <a:r>
-              <a:rPr lang="fr-BE" sz="2000" dirty="0"/>
-              <a:t>The </a:t>
-            </a:r>
-            <a:r>
-              <a:rPr lang="fr-BE" sz="2000" dirty="0" err="1"/>
-              <a:t>project</a:t>
-            </a:r>
-            <a:r>
-              <a:rPr lang="fr-BE" sz="2000" dirty="0"/>
-              <a:t> </a:t>
-            </a:r>
-            <a:r>
-              <a:rPr lang="fr-BE" sz="2000" dirty="0" err="1"/>
-              <a:t>follows</a:t>
-            </a:r>
-            <a:r>
-              <a:rPr lang="fr-BE" sz="2000" dirty="0"/>
-              <a:t> a </a:t>
-            </a:r>
-            <a:r>
-              <a:rPr lang="fr-BE" sz="2000" dirty="0" err="1"/>
-              <a:t>layered</a:t>
-            </a:r>
-            <a:r>
-              <a:rPr lang="fr-BE" sz="2000" dirty="0"/>
-              <a:t> data architecture </a:t>
-            </a:r>
-            <a:r>
-              <a:rPr lang="fr-BE" sz="2000" dirty="0" err="1"/>
-              <a:t>designed</a:t>
-            </a:r>
-            <a:r>
-              <a:rPr lang="fr-BE" sz="2000" dirty="0"/>
-              <a:t> to </a:t>
-            </a:r>
-            <a:r>
-              <a:rPr lang="fr-BE" sz="2000" dirty="0" err="1"/>
-              <a:t>ensure</a:t>
-            </a:r>
-            <a:r>
-              <a:rPr lang="fr-BE" sz="2000" dirty="0"/>
-              <a:t> data </a:t>
-            </a:r>
-            <a:r>
-              <a:rPr lang="fr-BE" sz="2000" dirty="0" err="1"/>
-              <a:t>quality</a:t>
-            </a:r>
-            <a:r>
-              <a:rPr lang="fr-BE" sz="2000" dirty="0"/>
-              <a:t>, </a:t>
-            </a:r>
-            <a:r>
-              <a:rPr lang="fr-BE" sz="2000" dirty="0" err="1"/>
-              <a:t>reproducibility</a:t>
-            </a:r>
-            <a:r>
-              <a:rPr lang="fr-BE" sz="2000" dirty="0"/>
-              <a:t>, and </a:t>
-            </a:r>
-            <a:r>
-              <a:rPr lang="fr-BE" sz="2000" dirty="0" err="1"/>
-              <a:t>analytical</a:t>
-            </a:r>
-            <a:r>
-              <a:rPr lang="fr-BE" sz="2000" dirty="0"/>
-              <a:t> </a:t>
-            </a:r>
-            <a:r>
-              <a:rPr lang="fr-BE" sz="2000" dirty="0" err="1"/>
-              <a:t>consistency</a:t>
-            </a:r>
-            <a:r>
-              <a:rPr lang="fr-BE" sz="2000" dirty="0"/>
-              <a:t>.</a:t>
-            </a:r>
-            <a:endParaRPr lang="en-US" sz="1900" dirty="0">
+              <a:rPr lang="en-US" sz="2000" noProof="0" dirty="0"/>
+              <a:t>The project follows a layered data architecture designed to ensure data quality, reproducibility, and analytical consistency.</a:t>
+            </a:r>
+            <a:endParaRPr lang="en-US" sz="1900" noProof="0" dirty="0">
               <a:solidFill>
                 <a:srgbClr val="000000"/>
               </a:solidFill>
@@ -9599,12 +9527,12 @@
               </a:spcBef>
             </a:pPr>
             <a:r>
-              <a:rPr lang="fr-BE" sz="2000" dirty="0">
+              <a:rPr lang="en-US" sz="2000" noProof="0" dirty="0">
                 <a:latin typeface="TT Hoves Bold" panose="020B0604020202020204" charset="0"/>
               </a:rPr>
               <a:t>RAW Layer</a:t>
             </a:r>
-            <a:endParaRPr lang="en-US" sz="1999" b="1" dirty="0">
+            <a:endParaRPr lang="en-US" sz="1999" b="1" noProof="0" dirty="0">
               <a:solidFill>
                 <a:srgbClr val="000000"/>
               </a:solidFill>
@@ -9646,7 +9574,7 @@
               </a:spcBef>
             </a:pPr>
             <a:r>
-              <a:rPr lang="en-US" sz="1600" b="1" dirty="0">
+              <a:rPr lang="en-US" sz="1600" b="1" noProof="0" dirty="0">
                 <a:solidFill>
                   <a:srgbClr val="FFFFFF"/>
                 </a:solidFill>
@@ -9697,10 +9625,10 @@
           </a:lstStyle>
           <a:p>
             <a:r>
-              <a:rPr lang="fr-BE" dirty="0"/>
+              <a:rPr lang="en-US" noProof="0" dirty="0"/>
               <a:t>STAGING Layer</a:t>
             </a:r>
-            <a:endParaRPr lang="en-US" dirty="0">
+            <a:endParaRPr lang="en-US" noProof="0" dirty="0">
               <a:sym typeface="TT Hoves Bold"/>
             </a:endParaRPr>
           </a:p>
@@ -9736,7 +9664,7 @@
               </a:spcBef>
             </a:pPr>
             <a:r>
-              <a:rPr lang="en-US" sz="1600" b="1" dirty="0">
+              <a:rPr lang="en-US" sz="1600" b="1" noProof="0" dirty="0">
                 <a:solidFill>
                   <a:srgbClr val="FFFFFF"/>
                 </a:solidFill>
@@ -9787,10 +9715,10 @@
           </a:lstStyle>
           <a:p>
             <a:r>
-              <a:rPr lang="fr-BE"/>
+              <a:rPr lang="en-US" noProof="0" dirty="0"/>
               <a:t>ANALYTICS Layer</a:t>
             </a:r>
-            <a:endParaRPr lang="en-US" dirty="0">
+            <a:endParaRPr lang="en-US" noProof="0" dirty="0">
               <a:sym typeface="TT Hoves Bold"/>
             </a:endParaRPr>
           </a:p>
@@ -9826,7 +9754,7 @@
               </a:spcBef>
             </a:pPr>
             <a:r>
-              <a:rPr lang="en-US" sz="1600" b="1" dirty="0">
+              <a:rPr lang="en-US" sz="1600" b="1" noProof="0" dirty="0">
                 <a:solidFill>
                   <a:srgbClr val="FFFFFF"/>
                 </a:solidFill>
@@ -9870,96 +9798,12 @@
               </a:spcBef>
             </a:pPr>
             <a:r>
-              <a:rPr lang="fr-BE" sz="1600" dirty="0">
-                <a:latin typeface="TT Hoves" panose="020B0604020202020204" charset="0"/>
-              </a:rPr>
-              <a:t>The RAW </a:t>
-            </a:r>
-            <a:r>
-              <a:rPr lang="fr-BE" sz="1600" dirty="0" err="1">
-                <a:latin typeface="TT Hoves" panose="020B0604020202020204" charset="0"/>
-              </a:rPr>
-              <a:t>schema</a:t>
-            </a:r>
-            <a:r>
-              <a:rPr lang="fr-BE" sz="1600" dirty="0">
-                <a:latin typeface="TT Hoves" panose="020B0604020202020204" charset="0"/>
-              </a:rPr>
-              <a:t> stores the original </a:t>
-            </a:r>
-            <a:r>
-              <a:rPr lang="fr-BE" sz="1600" dirty="0" err="1">
-                <a:latin typeface="TT Hoves" panose="020B0604020202020204" charset="0"/>
-              </a:rPr>
-              <a:t>datasets</a:t>
-            </a:r>
-            <a:r>
-              <a:rPr lang="fr-BE" sz="1600" dirty="0">
-                <a:latin typeface="TT Hoves" panose="020B0604020202020204" charset="0"/>
-              </a:rPr>
-              <a:t> </a:t>
-            </a:r>
-            <a:r>
-              <a:rPr lang="fr-BE" sz="1600" dirty="0" err="1">
-                <a:latin typeface="TT Hoves" panose="020B0604020202020204" charset="0"/>
-              </a:rPr>
-              <a:t>exactly</a:t>
-            </a:r>
-            <a:r>
-              <a:rPr lang="fr-BE" sz="1600" dirty="0">
-                <a:latin typeface="TT Hoves" panose="020B0604020202020204" charset="0"/>
-              </a:rPr>
-              <a:t> as </a:t>
-            </a:r>
-            <a:r>
-              <a:rPr lang="fr-BE" sz="1600" dirty="0" err="1">
-                <a:latin typeface="TT Hoves" panose="020B0604020202020204" charset="0"/>
-              </a:rPr>
-              <a:t>they</a:t>
-            </a:r>
-            <a:r>
-              <a:rPr lang="fr-BE" sz="1600" dirty="0">
-                <a:latin typeface="TT Hoves" panose="020B0604020202020204" charset="0"/>
-              </a:rPr>
-              <a:t> </a:t>
-            </a:r>
-            <a:r>
-              <a:rPr lang="fr-BE" sz="1600" dirty="0" err="1">
-                <a:latin typeface="TT Hoves" panose="020B0604020202020204" charset="0"/>
-              </a:rPr>
-              <a:t>were</a:t>
-            </a:r>
-            <a:r>
-              <a:rPr lang="fr-BE" sz="1600" dirty="0">
-                <a:latin typeface="TT Hoves" panose="020B0604020202020204" charset="0"/>
-              </a:rPr>
-              <a:t> </a:t>
-            </a:r>
-            <a:r>
-              <a:rPr lang="fr-BE" sz="1600" dirty="0" err="1">
-                <a:latin typeface="TT Hoves" panose="020B0604020202020204" charset="0"/>
-              </a:rPr>
-              <a:t>received</a:t>
-            </a:r>
-            <a:r>
-              <a:rPr lang="fr-BE" sz="1600" dirty="0">
-                <a:latin typeface="TT Hoves" panose="020B0604020202020204" charset="0"/>
-              </a:rPr>
-              <a:t> </a:t>
-            </a:r>
-            <a:r>
-              <a:rPr lang="fr-BE" sz="1600" dirty="0" err="1">
-                <a:latin typeface="TT Hoves" panose="020B0604020202020204" charset="0"/>
-              </a:rPr>
-              <a:t>from</a:t>
-            </a:r>
-            <a:r>
-              <a:rPr lang="fr-BE" sz="1600" dirty="0">
-                <a:latin typeface="TT Hoves" panose="020B0604020202020204" charset="0"/>
-              </a:rPr>
-              <a:t> the source CSV files.</a:t>
-            </a:r>
-            <a:endParaRPr lang="en-US" sz="1600" dirty="0">
+              <a:rPr lang="en-US" sz="1600" noProof="0" dirty="0">
+                <a:latin typeface="TT Hoves" panose="020B0604020202020204" charset="0"/>
+              </a:rPr>
+              <a:t>The RAW schema stores the original datasets exactly as they were received from the source CSV files.</a:t>
+            </a:r>
+            <a:endParaRPr lang="en-US" sz="1600" noProof="0" dirty="0">
               <a:solidFill>
                 <a:srgbClr val="000000"/>
               </a:solidFill>
@@ -10008,66 +9852,10 @@
           </a:lstStyle>
           <a:p>
             <a:r>
-              <a:rPr lang="fr-BE" dirty="0"/>
-              <a:t>The STAGING </a:t>
-            </a:r>
-            <a:r>
-              <a:rPr lang="fr-BE" dirty="0" err="1"/>
-              <a:t>schema</a:t>
-            </a:r>
-            <a:r>
-              <a:rPr lang="fr-BE" dirty="0"/>
-              <a:t> </a:t>
-            </a:r>
-            <a:r>
-              <a:rPr lang="fr-BE" dirty="0" err="1"/>
-              <a:t>is</a:t>
-            </a:r>
-            <a:r>
-              <a:rPr lang="fr-BE" dirty="0"/>
-              <a:t> </a:t>
-            </a:r>
-            <a:r>
-              <a:rPr lang="fr-BE" dirty="0" err="1"/>
-              <a:t>used</a:t>
-            </a:r>
-            <a:r>
-              <a:rPr lang="fr-BE" dirty="0"/>
-              <a:t> to </a:t>
-            </a:r>
-            <a:r>
-              <a:rPr lang="fr-BE" dirty="0" err="1"/>
-              <a:t>standardize</a:t>
-            </a:r>
-            <a:r>
-              <a:rPr lang="fr-BE" dirty="0"/>
-              <a:t> and </a:t>
-            </a:r>
-            <a:r>
-              <a:rPr lang="fr-BE" dirty="0" err="1"/>
-              <a:t>prepare</a:t>
-            </a:r>
-            <a:r>
-              <a:rPr lang="fr-BE" dirty="0"/>
-              <a:t> the data for </a:t>
-            </a:r>
-            <a:r>
-              <a:rPr lang="fr-BE" dirty="0" err="1"/>
-              <a:t>analytical</a:t>
-            </a:r>
-            <a:r>
-              <a:rPr lang="fr-BE" dirty="0"/>
-              <a:t> </a:t>
-            </a:r>
-            <a:r>
-              <a:rPr lang="fr-BE" dirty="0" err="1"/>
-              <a:t>processing</a:t>
-            </a:r>
-            <a:r>
-              <a:rPr lang="fr-BE" dirty="0"/>
-              <a:t>.</a:t>
-            </a:r>
-            <a:endParaRPr lang="en-US" dirty="0">
+              <a:rPr lang="en-US" noProof="0" dirty="0"/>
+              <a:t>The STAGING schema is used to standardize and prepare the data for analytical processing.</a:t>
+            </a:r>
+            <a:endParaRPr lang="en-US" noProof="0" dirty="0">
               <a:sym typeface="TT Hoves"/>
             </a:endParaRPr>
           </a:p>
@@ -10110,66 +9898,10 @@
           </a:lstStyle>
           <a:p>
             <a:r>
-              <a:rPr lang="fr-BE" dirty="0"/>
-              <a:t>The ANALYTICS </a:t>
-            </a:r>
-            <a:r>
-              <a:rPr lang="fr-BE" dirty="0" err="1"/>
-              <a:t>schema</a:t>
-            </a:r>
-            <a:r>
-              <a:rPr lang="fr-BE" dirty="0"/>
-              <a:t> </a:t>
-            </a:r>
-            <a:r>
-              <a:rPr lang="fr-BE" dirty="0" err="1"/>
-              <a:t>contains</a:t>
-            </a:r>
-            <a:r>
-              <a:rPr lang="fr-BE" dirty="0"/>
-              <a:t> the final </a:t>
-            </a:r>
-            <a:r>
-              <a:rPr lang="fr-BE" dirty="0" err="1"/>
-              <a:t>dimensional</a:t>
-            </a:r>
-            <a:r>
-              <a:rPr lang="fr-BE" dirty="0"/>
-              <a:t> model </a:t>
-            </a:r>
-            <a:r>
-              <a:rPr lang="fr-BE" dirty="0" err="1"/>
-              <a:t>used</a:t>
-            </a:r>
-            <a:r>
-              <a:rPr lang="fr-BE" dirty="0"/>
-              <a:t> for </a:t>
-            </a:r>
-            <a:r>
-              <a:rPr lang="fr-BE" dirty="0" err="1"/>
-              <a:t>reporting</a:t>
-            </a:r>
-            <a:r>
-              <a:rPr lang="fr-BE" dirty="0"/>
-              <a:t>, machine </a:t>
-            </a:r>
-            <a:r>
-              <a:rPr lang="fr-BE" dirty="0" err="1"/>
-              <a:t>learning</a:t>
-            </a:r>
-            <a:r>
-              <a:rPr lang="fr-BE" dirty="0"/>
-              <a:t>, and business </a:t>
-            </a:r>
-            <a:r>
-              <a:rPr lang="fr-BE" dirty="0" err="1"/>
-              <a:t>analysis</a:t>
-            </a:r>
-            <a:r>
-              <a:rPr lang="fr-BE" dirty="0"/>
-              <a:t>.</a:t>
-            </a:r>
-            <a:endParaRPr lang="en-US" dirty="0">
+              <a:rPr lang="en-US" noProof="0" dirty="0"/>
+              <a:t>The ANALYTICS schema contains the final dimensional model used for reporting, machine learning, and business analysis.</a:t>
+            </a:r>
+            <a:endParaRPr lang="en-US" noProof="0" dirty="0">
               <a:sym typeface="TT Hoves"/>
             </a:endParaRPr>
           </a:p>
@@ -10211,7 +9943,7 @@
               </a:spcBef>
             </a:pPr>
             <a:r>
-              <a:rPr lang="en-US" sz="2800" b="1" dirty="0">
+              <a:rPr lang="en-US" sz="2800" b="1" noProof="0" dirty="0">
                 <a:solidFill>
                   <a:srgbClr val="FFFFFF"/>
                 </a:solidFill>
@@ -10254,7 +9986,7 @@
           <a:lstStyle/>
           <a:p>
             <a:r>
-              <a:rPr lang="fr-BE" sz="2800" dirty="0">
+              <a:rPr lang="en-US" sz="2800" noProof="0" dirty="0">
                 <a:solidFill>
                   <a:schemeClr val="bg1"/>
                 </a:solidFill>
@@ -10306,7 +10038,7 @@
           </a:lstStyle>
           <a:p>
             <a:r>
-              <a:rPr lang="fr-BE" dirty="0"/>
+              <a:rPr lang="en-US" noProof="0" dirty="0"/>
               <a:t>ANALYTICS</a:t>
             </a:r>
           </a:p>
@@ -10341,12 +10073,12 @@
           <a:lstStyle/>
           <a:p>
             <a:r>
-              <a:rPr lang="fr-BE" b="1" dirty="0">
+              <a:rPr lang="en-US" b="1" noProof="0" dirty="0">
                 <a:latin typeface="TT Hoves" panose="020B0604020202020204" charset="0"/>
               </a:rPr>
               <a:t>Purpose:</a:t>
             </a:r>
-            <a:endParaRPr lang="fr-BE" dirty="0">
+            <a:endParaRPr lang="en-US" noProof="0" dirty="0">
               <a:latin typeface="TT Hoves" panose="020B0604020202020204" charset="0"/>
             </a:endParaRPr>
           </a:p>
@@ -10356,7 +10088,7 @@
               <a:buChar char="ü"/>
             </a:pPr>
             <a:r>
-              <a:rPr lang="fr-BE" dirty="0">
+              <a:rPr lang="en-US" noProof="0" dirty="0">
                 <a:latin typeface="TT Hoves" panose="020B0604020202020204" charset="0"/>
               </a:rPr>
               <a:t>Preserve the original data. </a:t>
@@ -10368,34 +10100,10 @@
               <a:buChar char="ü"/>
             </a:pPr>
             <a:r>
-              <a:rPr lang="fr-BE" dirty="0">
-                <a:latin typeface="TT Hoves" panose="020B0604020202020204" charset="0"/>
-              </a:rPr>
-              <a:t>Enable data </a:t>
-            </a:r>
-            <a:r>
-              <a:rPr lang="fr-BE" dirty="0" err="1">
-                <a:latin typeface="TT Hoves" panose="020B0604020202020204" charset="0"/>
-              </a:rPr>
-              <a:t>lineage</a:t>
-            </a:r>
-            <a:r>
-              <a:rPr lang="fr-BE" dirty="0">
-                <a:latin typeface="TT Hoves" panose="020B0604020202020204" charset="0"/>
-              </a:rPr>
-              <a:t> and </a:t>
-            </a:r>
-            <a:r>
-              <a:rPr lang="fr-BE" dirty="0" err="1">
-                <a:latin typeface="TT Hoves" panose="020B0604020202020204" charset="0"/>
-              </a:rPr>
-              <a:t>traceability</a:t>
-            </a:r>
-            <a:r>
-              <a:rPr lang="fr-BE" dirty="0">
-                <a:latin typeface="TT Hoves" panose="020B0604020202020204" charset="0"/>
-              </a:rPr>
-              <a:t>. </a:t>
+              <a:rPr lang="en-US" noProof="0" dirty="0">
+                <a:latin typeface="TT Hoves" panose="020B0604020202020204" charset="0"/>
+              </a:rPr>
+              <a:t>Enable data lineage and traceability. </a:t>
             </a:r>
           </a:p>
           <a:p>
@@ -10404,74 +10112,20 @@
               <a:buChar char="ü"/>
             </a:pPr>
             <a:r>
-              <a:rPr lang="fr-BE" dirty="0" err="1">
-                <a:latin typeface="TT Hoves" panose="020B0604020202020204" charset="0"/>
-              </a:rPr>
-              <a:t>Allow</a:t>
-            </a:r>
-            <a:r>
-              <a:rPr lang="fr-BE" dirty="0">
-                <a:latin typeface="TT Hoves" panose="020B0604020202020204" charset="0"/>
-              </a:rPr>
-              <a:t> the pipeline to </a:t>
-            </a:r>
-            <a:r>
-              <a:rPr lang="fr-BE" dirty="0" err="1">
-                <a:latin typeface="TT Hoves" panose="020B0604020202020204" charset="0"/>
-              </a:rPr>
-              <a:t>be</a:t>
-            </a:r>
-            <a:r>
-              <a:rPr lang="fr-BE" dirty="0">
-                <a:latin typeface="TT Hoves" panose="020B0604020202020204" charset="0"/>
-              </a:rPr>
-              <a:t> </a:t>
-            </a:r>
-            <a:r>
-              <a:rPr lang="fr-BE" dirty="0" err="1">
-                <a:latin typeface="TT Hoves" panose="020B0604020202020204" charset="0"/>
-              </a:rPr>
-              <a:t>rebuilt</a:t>
-            </a:r>
-            <a:r>
-              <a:rPr lang="fr-BE" dirty="0">
-                <a:latin typeface="TT Hoves" panose="020B0604020202020204" charset="0"/>
-              </a:rPr>
-              <a:t> </a:t>
-            </a:r>
-            <a:r>
-              <a:rPr lang="fr-BE" dirty="0" err="1">
-                <a:latin typeface="TT Hoves" panose="020B0604020202020204" charset="0"/>
-              </a:rPr>
-              <a:t>from</a:t>
-            </a:r>
-            <a:r>
-              <a:rPr lang="fr-BE" dirty="0">
-                <a:latin typeface="TT Hoves" panose="020B0604020202020204" charset="0"/>
-              </a:rPr>
-              <a:t> scratch at </a:t>
-            </a:r>
-            <a:r>
-              <a:rPr lang="fr-BE" dirty="0" err="1">
-                <a:latin typeface="TT Hoves" panose="020B0604020202020204" charset="0"/>
-              </a:rPr>
-              <a:t>any</a:t>
-            </a:r>
-            <a:r>
-              <a:rPr lang="fr-BE" dirty="0">
-                <a:latin typeface="TT Hoves" panose="020B0604020202020204" charset="0"/>
-              </a:rPr>
-              <a:t> time. </a:t>
-            </a:r>
-          </a:p>
-          <a:p>
-            <a:r>
-              <a:rPr lang="fr-BE" b="1" dirty="0">
+              <a:rPr lang="en-US" noProof="0" dirty="0">
+                <a:latin typeface="TT Hoves" panose="020B0604020202020204" charset="0"/>
+              </a:rPr>
+              <a:t>Allow the pipeline to be rebuilt from scratch at any time. </a:t>
+            </a:r>
+          </a:p>
+          <a:p>
+            <a:r>
+              <a:rPr lang="en-US" b="1" noProof="0" dirty="0">
                 <a:latin typeface="TT Hoves" panose="020B0604020202020204" charset="0"/>
               </a:rPr>
               <a:t>Process:</a:t>
             </a:r>
-            <a:endParaRPr lang="fr-BE" dirty="0">
+            <a:endParaRPr lang="en-US" noProof="0" dirty="0">
               <a:latin typeface="TT Hoves" panose="020B0604020202020204" charset="0"/>
             </a:endParaRPr>
           </a:p>
@@ -10481,34 +10135,10 @@
               <a:buChar char="ü"/>
             </a:pPr>
             <a:r>
-              <a:rPr lang="fr-BE" dirty="0">
-                <a:latin typeface="TT Hoves" panose="020B0604020202020204" charset="0"/>
-              </a:rPr>
-              <a:t>CSV files are </a:t>
-            </a:r>
-            <a:r>
-              <a:rPr lang="fr-BE" dirty="0" err="1">
-                <a:latin typeface="TT Hoves" panose="020B0604020202020204" charset="0"/>
-              </a:rPr>
-              <a:t>extracted</a:t>
-            </a:r>
-            <a:r>
-              <a:rPr lang="fr-BE" dirty="0">
-                <a:latin typeface="TT Hoves" panose="020B0604020202020204" charset="0"/>
-              </a:rPr>
-              <a:t> </a:t>
-            </a:r>
-            <a:r>
-              <a:rPr lang="fr-BE" dirty="0" err="1">
-                <a:latin typeface="TT Hoves" panose="020B0604020202020204" charset="0"/>
-              </a:rPr>
-              <a:t>using</a:t>
-            </a:r>
-            <a:r>
-              <a:rPr lang="fr-BE" dirty="0">
-                <a:latin typeface="TT Hoves" panose="020B0604020202020204" charset="0"/>
-              </a:rPr>
-              <a:t> Python and Pandas. </a:t>
+              <a:rPr lang="en-US" noProof="0" dirty="0">
+                <a:latin typeface="TT Hoves" panose="020B0604020202020204" charset="0"/>
+              </a:rPr>
+              <a:t>CSV files are extracted using Python and Pandas. </a:t>
             </a:r>
           </a:p>
           <a:p>
@@ -10517,70 +10147,10 @@
               <a:buChar char="ü"/>
             </a:pPr>
             <a:r>
-              <a:rPr lang="fr-BE" dirty="0">
-                <a:latin typeface="TT Hoves" panose="020B0604020202020204" charset="0"/>
-              </a:rPr>
-              <a:t>Data </a:t>
-            </a:r>
-            <a:r>
-              <a:rPr lang="fr-BE" dirty="0" err="1">
-                <a:latin typeface="TT Hoves" panose="020B0604020202020204" charset="0"/>
-              </a:rPr>
-              <a:t>is</a:t>
-            </a:r>
-            <a:r>
-              <a:rPr lang="fr-BE" dirty="0">
-                <a:latin typeface="TT Hoves" panose="020B0604020202020204" charset="0"/>
-              </a:rPr>
-              <a:t> </a:t>
-            </a:r>
-            <a:r>
-              <a:rPr lang="fr-BE" dirty="0" err="1">
-                <a:latin typeface="TT Hoves" panose="020B0604020202020204" charset="0"/>
-              </a:rPr>
-              <a:t>loaded</a:t>
-            </a:r>
-            <a:r>
-              <a:rPr lang="fr-BE" dirty="0">
-                <a:latin typeface="TT Hoves" panose="020B0604020202020204" charset="0"/>
-              </a:rPr>
-              <a:t> </a:t>
-            </a:r>
-            <a:r>
-              <a:rPr lang="fr-BE" dirty="0" err="1">
-                <a:latin typeface="TT Hoves" panose="020B0604020202020204" charset="0"/>
-              </a:rPr>
-              <a:t>into</a:t>
-            </a:r>
-            <a:r>
-              <a:rPr lang="fr-BE" dirty="0">
-                <a:latin typeface="TT Hoves" panose="020B0604020202020204" charset="0"/>
-              </a:rPr>
-              <a:t> PostgreSQL </a:t>
-            </a:r>
-            <a:r>
-              <a:rPr lang="fr-BE" dirty="0" err="1">
-                <a:latin typeface="TT Hoves" panose="020B0604020202020204" charset="0"/>
-              </a:rPr>
-              <a:t>using</a:t>
-            </a:r>
-            <a:r>
-              <a:rPr lang="fr-BE" dirty="0">
-                <a:latin typeface="TT Hoves" panose="020B0604020202020204" charset="0"/>
-              </a:rPr>
-              <a:t> </a:t>
-            </a:r>
-            <a:r>
-              <a:rPr lang="fr-BE" dirty="0" err="1">
-                <a:latin typeface="TT Hoves" panose="020B0604020202020204" charset="0"/>
-              </a:rPr>
-              <a:t>SQLAlchemy</a:t>
-            </a:r>
-            <a:r>
-              <a:rPr lang="fr-BE" dirty="0">
-                <a:latin typeface="TT Hoves" panose="020B0604020202020204" charset="0"/>
-              </a:rPr>
-              <a:t>. </a:t>
+              <a:rPr lang="en-US" noProof="0" dirty="0">
+                <a:latin typeface="TT Hoves" panose="020B0604020202020204" charset="0"/>
+              </a:rPr>
+              <a:t>Data is loaded into PostgreSQL using SQLAlchemy. </a:t>
             </a:r>
           </a:p>
           <a:p>
@@ -10589,38 +10159,14 @@
               <a:buChar char="ü"/>
             </a:pPr>
             <a:r>
-              <a:rPr lang="fr-BE" dirty="0">
-                <a:latin typeface="TT Hoves" panose="020B0604020202020204" charset="0"/>
-              </a:rPr>
-              <a:t>No transformations are </a:t>
-            </a:r>
-            <a:r>
-              <a:rPr lang="fr-BE" dirty="0" err="1">
-                <a:latin typeface="TT Hoves" panose="020B0604020202020204" charset="0"/>
-              </a:rPr>
-              <a:t>applied</a:t>
-            </a:r>
-            <a:r>
-              <a:rPr lang="fr-BE" dirty="0">
-                <a:latin typeface="TT Hoves" panose="020B0604020202020204" charset="0"/>
-              </a:rPr>
-              <a:t> at </a:t>
-            </a:r>
-            <a:r>
-              <a:rPr lang="fr-BE" dirty="0" err="1">
-                <a:latin typeface="TT Hoves" panose="020B0604020202020204" charset="0"/>
-              </a:rPr>
-              <a:t>this</a:t>
-            </a:r>
-            <a:r>
-              <a:rPr lang="fr-BE" dirty="0">
-                <a:latin typeface="TT Hoves" panose="020B0604020202020204" charset="0"/>
-              </a:rPr>
-              <a:t> stage.</a:t>
-            </a:r>
-          </a:p>
-          <a:p>
-            <a:endParaRPr lang="fr-BE" dirty="0">
+              <a:rPr lang="en-US" noProof="0" dirty="0">
+                <a:latin typeface="TT Hoves" panose="020B0604020202020204" charset="0"/>
+              </a:rPr>
+              <a:t>No transformations are applied at this stage.</a:t>
+            </a:r>
+          </a:p>
+          <a:p>
+            <a:endParaRPr lang="en-US" noProof="0" dirty="0">
               <a:latin typeface="TT Hoves" panose="020B0604020202020204" charset="0"/>
             </a:endParaRPr>
           </a:p>
@@ -10664,7 +10210,7 @@
           </a:lstStyle>
           <a:p>
             <a:r>
-              <a:rPr lang="fr-BE" dirty="0"/>
+              <a:rPr lang="en-US" noProof="0" dirty="0"/>
               <a:t>Purpose:</a:t>
             </a:r>
           </a:p>
@@ -10674,12 +10220,8 @@
               <a:buChar char="ü"/>
             </a:pPr>
             <a:r>
-              <a:rPr lang="fr-BE" b="0" dirty="0" err="1"/>
-              <a:t>Convert</a:t>
-            </a:r>
-            <a:r>
-              <a:rPr lang="fr-BE" b="0" dirty="0"/>
-              <a:t> data types. </a:t>
+              <a:rPr lang="en-US" b="0" noProof="0" dirty="0"/>
+              <a:t>Convert data types. </a:t>
             </a:r>
           </a:p>
           <a:p>
@@ -10688,12 +10230,8 @@
               <a:buChar char="ü"/>
             </a:pPr>
             <a:r>
-              <a:rPr lang="fr-BE" b="0" dirty="0" err="1"/>
-              <a:t>Standardize</a:t>
-            </a:r>
-            <a:r>
-              <a:rPr lang="fr-BE" b="0" dirty="0"/>
-              <a:t> table structures. </a:t>
+              <a:rPr lang="en-US" b="0" noProof="0" dirty="0"/>
+              <a:t>Standardize table structures. </a:t>
             </a:r>
           </a:p>
           <a:p>
@@ -10702,42 +10240,14 @@
               <a:buChar char="ü"/>
             </a:pPr>
             <a:r>
-              <a:rPr lang="fr-BE" b="0" dirty="0" err="1"/>
-              <a:t>Separate</a:t>
-            </a:r>
-            <a:r>
-              <a:rPr lang="fr-BE" b="0" dirty="0"/>
-              <a:t> transformation </a:t>
-            </a:r>
-            <a:r>
-              <a:rPr lang="fr-BE" b="0" dirty="0" err="1"/>
-              <a:t>logic</a:t>
-            </a:r>
-            <a:r>
-              <a:rPr lang="fr-BE" b="0" dirty="0"/>
-              <a:t> </a:t>
-            </a:r>
-            <a:r>
-              <a:rPr lang="fr-BE" b="0" dirty="0" err="1"/>
-              <a:t>from</a:t>
-            </a:r>
-            <a:r>
-              <a:rPr lang="fr-BE" b="0" dirty="0"/>
-              <a:t> source data. </a:t>
-            </a:r>
-          </a:p>
-          <a:p>
-            <a:r>
-              <a:rPr lang="fr-BE" dirty="0"/>
-              <a:t>Transformations </a:t>
-            </a:r>
-            <a:r>
-              <a:rPr lang="fr-BE" dirty="0" err="1"/>
-              <a:t>Applied</a:t>
-            </a:r>
-            <a:r>
-              <a:rPr lang="fr-BE" dirty="0"/>
-              <a:t>:</a:t>
+              <a:rPr lang="en-US" b="0" noProof="0" dirty="0"/>
+              <a:t>Separate transformation logic from source data. </a:t>
+            </a:r>
+          </a:p>
+          <a:p>
+            <a:r>
+              <a:rPr lang="en-US" noProof="0" dirty="0"/>
+              <a:t>Transformations Applied:</a:t>
             </a:r>
           </a:p>
           <a:p>
@@ -10746,7 +10256,7 @@
               <a:buChar char="ü"/>
             </a:pPr>
             <a:r>
-              <a:rPr lang="fr-BE" b="0" dirty="0"/>
+              <a:rPr lang="en-US" b="0" noProof="0" dirty="0"/>
               <a:t>String to timestamp conversions. </a:t>
             </a:r>
           </a:p>
@@ -10756,20 +10266,8 @@
               <a:buChar char="ü"/>
             </a:pPr>
             <a:r>
-              <a:rPr lang="fr-BE" b="0" dirty="0" err="1"/>
-              <a:t>Numeric</a:t>
-            </a:r>
-            <a:r>
-              <a:rPr lang="fr-BE" b="0" dirty="0"/>
-              <a:t> type </a:t>
-            </a:r>
-            <a:r>
-              <a:rPr lang="fr-BE" b="0" dirty="0" err="1"/>
-              <a:t>standardization</a:t>
-            </a:r>
-            <a:r>
-              <a:rPr lang="fr-BE" b="0" dirty="0"/>
-              <a:t>. </a:t>
+              <a:rPr lang="en-US" b="0" noProof="0" dirty="0"/>
+              <a:t>Numeric type standardization. </a:t>
             </a:r>
           </a:p>
           <a:p>
@@ -10778,28 +10276,12 @@
               <a:buChar char="ü"/>
             </a:pPr>
             <a:r>
-              <a:rPr lang="fr-BE" b="0" dirty="0"/>
-              <a:t>Data </a:t>
-            </a:r>
-            <a:r>
-              <a:rPr lang="fr-BE" b="0" dirty="0" err="1"/>
-              <a:t>preparation</a:t>
-            </a:r>
-            <a:r>
-              <a:rPr lang="fr-BE" b="0" dirty="0"/>
-              <a:t> for </a:t>
-            </a:r>
-            <a:r>
-              <a:rPr lang="fr-BE" b="0" dirty="0" err="1"/>
-              <a:t>dimensional</a:t>
-            </a:r>
-            <a:r>
-              <a:rPr lang="fr-BE" b="0" dirty="0"/>
-              <a:t> modeling.</a:t>
-            </a:r>
-          </a:p>
-          <a:p>
-            <a:endParaRPr lang="fr-BE" b="0" dirty="0"/>
+              <a:rPr lang="en-US" b="0" noProof="0" dirty="0"/>
+              <a:t>Data preparation for dimensional modeling.</a:t>
+            </a:r>
+          </a:p>
+          <a:p>
+            <a:endParaRPr lang="en-US" b="0" noProof="0" dirty="0"/>
           </a:p>
         </p:txBody>
       </p:sp>
@@ -10832,12 +10314,12 @@
           <a:lstStyle/>
           <a:p>
             <a:r>
-              <a:rPr lang="fr-BE" b="1" dirty="0">
+              <a:rPr lang="en-US" b="1" noProof="0" dirty="0">
                 <a:latin typeface="TT Hoves" panose="020B0604020202020204" charset="0"/>
               </a:rPr>
               <a:t>Purpose:</a:t>
             </a:r>
-            <a:endParaRPr lang="fr-BE" dirty="0">
+            <a:endParaRPr lang="en-US" noProof="0" dirty="0">
               <a:latin typeface="TT Hoves" panose="020B0604020202020204" charset="0"/>
             </a:endParaRPr>
           </a:p>
@@ -10847,28 +10329,10 @@
               <a:buChar char="ü"/>
             </a:pPr>
             <a:r>
-              <a:rPr lang="fr-BE" dirty="0" err="1">
-                <a:latin typeface="TT Hoves" panose="020B0604020202020204" charset="0"/>
-              </a:rPr>
-              <a:t>Create</a:t>
-            </a:r>
-            <a:r>
-              <a:rPr lang="fr-BE" dirty="0">
-                <a:latin typeface="TT Hoves" panose="020B0604020202020204" charset="0"/>
-              </a:rPr>
-              <a:t> a business-</a:t>
-            </a:r>
-            <a:r>
-              <a:rPr lang="fr-BE" dirty="0" err="1">
-                <a:latin typeface="TT Hoves" panose="020B0604020202020204" charset="0"/>
-              </a:rPr>
-              <a:t>friendly</a:t>
-            </a:r>
-            <a:r>
-              <a:rPr lang="fr-BE" dirty="0">
-                <a:latin typeface="TT Hoves" panose="020B0604020202020204" charset="0"/>
-              </a:rPr>
-              <a:t> data model. </a:t>
+              <a:rPr lang="en-US" noProof="0" dirty="0">
+                <a:latin typeface="TT Hoves" panose="020B0604020202020204" charset="0"/>
+              </a:rPr>
+              <a:t>Create a business-friendly data model. </a:t>
             </a:r>
           </a:p>
           <a:p>
@@ -10877,28 +10341,10 @@
               <a:buChar char="ü"/>
             </a:pPr>
             <a:r>
-              <a:rPr lang="fr-BE" dirty="0" err="1">
-                <a:latin typeface="TT Hoves" panose="020B0604020202020204" charset="0"/>
-              </a:rPr>
-              <a:t>Improve</a:t>
-            </a:r>
-            <a:r>
-              <a:rPr lang="fr-BE" dirty="0">
-                <a:latin typeface="TT Hoves" panose="020B0604020202020204" charset="0"/>
-              </a:rPr>
-              <a:t> </a:t>
-            </a:r>
-            <a:r>
-              <a:rPr lang="fr-BE" dirty="0" err="1">
-                <a:latin typeface="TT Hoves" panose="020B0604020202020204" charset="0"/>
-              </a:rPr>
-              <a:t>query</a:t>
-            </a:r>
-            <a:r>
-              <a:rPr lang="fr-BE" dirty="0">
-                <a:latin typeface="TT Hoves" panose="020B0604020202020204" charset="0"/>
-              </a:rPr>
-              <a:t> performance. </a:t>
+              <a:rPr lang="en-US" noProof="0" dirty="0">
+                <a:latin typeface="TT Hoves" panose="020B0604020202020204" charset="0"/>
+              </a:rPr>
+              <a:t>Improve query performance. </a:t>
             </a:r>
           </a:p>
           <a:p>
@@ -10907,39 +10353,15 @@
               <a:buChar char="ü"/>
             </a:pPr>
             <a:r>
-              <a:rPr lang="fr-BE" dirty="0">
-                <a:latin typeface="TT Hoves" panose="020B0604020202020204" charset="0"/>
-              </a:rPr>
-              <a:t>Support </a:t>
-            </a:r>
-            <a:r>
-              <a:rPr lang="fr-BE" dirty="0" err="1">
-                <a:latin typeface="TT Hoves" panose="020B0604020202020204" charset="0"/>
-              </a:rPr>
-              <a:t>analytics</a:t>
-            </a:r>
-            <a:r>
-              <a:rPr lang="fr-BE" dirty="0">
-                <a:latin typeface="TT Hoves" panose="020B0604020202020204" charset="0"/>
-              </a:rPr>
-              <a:t> and </a:t>
-            </a:r>
-            <a:r>
-              <a:rPr lang="fr-BE" dirty="0" err="1">
-                <a:latin typeface="TT Hoves" panose="020B0604020202020204" charset="0"/>
-              </a:rPr>
-              <a:t>predictive</a:t>
-            </a:r>
-            <a:r>
-              <a:rPr lang="fr-BE" dirty="0">
-                <a:latin typeface="TT Hoves" panose="020B0604020202020204" charset="0"/>
-              </a:rPr>
-              <a:t> modeling. </a:t>
-            </a:r>
-          </a:p>
-          <a:p>
-            <a:r>
-              <a:rPr lang="fr-BE" b="1" dirty="0">
+              <a:rPr lang="en-US" noProof="0" dirty="0">
+                <a:latin typeface="TT Hoves" panose="020B0604020202020204" charset="0"/>
+              </a:rPr>
+              <a:t>Support analytics and predictive modeling. </a:t>
+            </a:r>
+          </a:p>
+          <a:p>
+            <a:r>
+              <a:rPr lang="en-US" b="1" noProof="0" dirty="0">
                 <a:latin typeface="TT Hoves" panose="020B0604020202020204" charset="0"/>
               </a:rPr>
               <a:t>Components:</a:t>
@@ -10951,7 +10373,7 @@
               <a:buChar char="ü"/>
             </a:pPr>
             <a:r>
-              <a:rPr lang="fr-BE" dirty="0">
+              <a:rPr lang="en-US" noProof="0" dirty="0">
                 <a:latin typeface="TT Hoves" panose="020B0604020202020204" charset="0"/>
               </a:rPr>
               <a:t>Fact Tables</a:t>
@@ -10963,7 +10385,7 @@
               <a:buChar char="ü"/>
             </a:pPr>
             <a:r>
-              <a:rPr lang="fr-BE" dirty="0">
+              <a:rPr lang="en-US" noProof="0" dirty="0">
                 <a:latin typeface="TT Hoves" panose="020B0604020202020204" charset="0"/>
               </a:rPr>
               <a:t>Dimension Tables</a:t>
@@ -10975,29 +10397,14 @@
               <a:buChar char="ü"/>
             </a:pPr>
             <a:r>
-              <a:rPr lang="fr-BE" dirty="0" err="1">
-                <a:latin typeface="TT Hoves" panose="020B0604020202020204" charset="0"/>
-              </a:rPr>
-              <a:t>Additional</a:t>
-            </a:r>
-            <a:r>
-              <a:rPr lang="fr-BE" dirty="0">
-                <a:latin typeface="TT Hoves" panose="020B0604020202020204" charset="0"/>
-              </a:rPr>
-              <a:t> </a:t>
-            </a:r>
-            <a:r>
-              <a:rPr lang="fr-BE" dirty="0" err="1">
-                <a:latin typeface="TT Hoves" panose="020B0604020202020204" charset="0"/>
-              </a:rPr>
-              <a:t>Features</a:t>
-            </a:r>
-            <a:endParaRPr lang="fr-BE" dirty="0">
-              <a:latin typeface="TT Hoves" panose="020B0604020202020204" charset="0"/>
-            </a:endParaRPr>
-          </a:p>
-          <a:p>
-            <a:endParaRPr lang="fr-BE" dirty="0">
+              <a:rPr lang="en-US" noProof="0" dirty="0">
+                <a:latin typeface="TT Hoves" panose="020B0604020202020204" charset="0"/>
+              </a:rPr>
+              <a:t>Additional Features</a:t>
+            </a:r>
+          </a:p>
+          <a:p>
+            <a:endParaRPr lang="en-US" noProof="0" dirty="0">
               <a:latin typeface="TT Hoves" panose="020B0604020202020204" charset="0"/>
             </a:endParaRPr>
           </a:p>
@@ -12042,110 +11449,6 @@
               <a:ea typeface="TT Hoves Bold"/>
               <a:cs typeface="TT Hoves Bold"/>
               <a:sym typeface="TT Hoves Bold"/>
-            </a:endParaRPr>
-          </a:p>
-        </p:txBody>
-      </p:sp>
-      <p:sp>
-        <p:nvSpPr>
-          <p:cNvPr id="28" name="TextBox 28"/>
-          <p:cNvSpPr txBox="1"/>
-          <p:nvPr/>
-        </p:nvSpPr>
-        <p:spPr>
-          <a:xfrm>
-            <a:off x="1028700" y="1706418"/>
-            <a:ext cx="6819900" cy="669414"/>
-          </a:xfrm>
-          <a:prstGeom prst="rect">
-            <a:avLst/>
-          </a:prstGeom>
-        </p:spPr>
-        <p:txBody>
-          <a:bodyPr wrap="square" lIns="0" tIns="0" rIns="0" bIns="0" rtlCol="0" anchor="t">
-            <a:spAutoFit/>
-          </a:bodyPr>
-          <a:lstStyle/>
-          <a:p>
-            <a:pPr>
-              <a:lnSpc>
-                <a:spcPts val="2660"/>
-              </a:lnSpc>
-            </a:pPr>
-            <a:r>
-              <a:rPr lang="fr-BE" sz="2000" dirty="0">
-                <a:latin typeface="TT Hoves" panose="020B0604020202020204" charset="0"/>
-              </a:rPr>
-              <a:t>To </a:t>
-            </a:r>
-            <a:r>
-              <a:rPr lang="fr-BE" sz="2000" dirty="0" err="1">
-                <a:latin typeface="TT Hoves" panose="020B0604020202020204" charset="0"/>
-              </a:rPr>
-              <a:t>ensure</a:t>
-            </a:r>
-            <a:r>
-              <a:rPr lang="fr-BE" sz="2000" dirty="0">
-                <a:latin typeface="TT Hoves" panose="020B0604020202020204" charset="0"/>
-              </a:rPr>
-              <a:t> </a:t>
-            </a:r>
-            <a:r>
-              <a:rPr lang="fr-BE" sz="2000" dirty="0" err="1">
-                <a:latin typeface="TT Hoves" panose="020B0604020202020204" charset="0"/>
-              </a:rPr>
-              <a:t>reproducibility</a:t>
-            </a:r>
-            <a:r>
-              <a:rPr lang="fr-BE" sz="2000" dirty="0">
-                <a:latin typeface="TT Hoves" panose="020B0604020202020204" charset="0"/>
-              </a:rPr>
-              <a:t>, Python scripts </a:t>
-            </a:r>
-            <a:r>
-              <a:rPr lang="fr-BE" sz="2000" dirty="0" err="1">
-                <a:latin typeface="TT Hoves" panose="020B0604020202020204" charset="0"/>
-              </a:rPr>
-              <a:t>were</a:t>
-            </a:r>
-            <a:r>
-              <a:rPr lang="fr-BE" sz="2000" dirty="0">
-                <a:latin typeface="TT Hoves" panose="020B0604020202020204" charset="0"/>
-              </a:rPr>
-              <a:t> </a:t>
-            </a:r>
-            <a:r>
-              <a:rPr lang="fr-BE" sz="2000" dirty="0" err="1">
-                <a:latin typeface="TT Hoves" panose="020B0604020202020204" charset="0"/>
-              </a:rPr>
-              <a:t>developed</a:t>
-            </a:r>
-            <a:r>
-              <a:rPr lang="fr-BE" sz="2000" dirty="0">
-                <a:latin typeface="TT Hoves" panose="020B0604020202020204" charset="0"/>
-              </a:rPr>
-              <a:t> to automate </a:t>
-            </a:r>
-            <a:r>
-              <a:rPr lang="fr-BE" sz="2000" dirty="0" err="1">
-                <a:latin typeface="TT Hoves" panose="020B0604020202020204" charset="0"/>
-              </a:rPr>
-              <a:t>each</a:t>
-            </a:r>
-            <a:r>
-              <a:rPr lang="fr-BE" sz="2000" dirty="0">
-                <a:latin typeface="TT Hoves" panose="020B0604020202020204" charset="0"/>
-              </a:rPr>
-              <a:t> stage of the pipeline.</a:t>
-            </a:r>
-            <a:endParaRPr lang="en-US" sz="1900" dirty="0">
-              <a:solidFill>
-                <a:srgbClr val="000000"/>
-              </a:solidFill>
-              <a:latin typeface="TT Hoves" panose="020B0604020202020204" charset="0"/>
-              <a:ea typeface="TT Hoves"/>
-              <a:cs typeface="TT Hoves"/>
-              <a:sym typeface="TT Hoves"/>
             </a:endParaRPr>
           </a:p>
         </p:txBody>
